--- a/assets/powerpoints/module-probleme/E2-je-retiens-des-mots.pptx
+++ b/assets/powerpoints/module-probleme/E2-je-retiens-des-mots.pptx
@@ -4294,7 +4294,7 @@
                 </a:solidFill>
                 <a:latin typeface="Verdana"/>
               </a:rPr>
-              <a:t>SÉANCE E2  ·  MODULE 9</a:t>
+              <a:t>SÉANCE E2  ·  MODULE 10</a:t>
             </a:r>
           </a:p>
         </p:txBody>

--- a/assets/powerpoints/module-probleme/E2-je-retiens-des-mots.pptx
+++ b/assets/powerpoints/module-probleme/E2-je-retiens-des-mots.pptx
@@ -4290,7 +4290,7 @@
             <a:r>
               <a:rPr sz="1300" b="1" i="0" spc="156">
                 <a:solidFill>
-                  <a:srgbClr val="166534"/>
+                  <a:srgbClr val="A5335F"/>
                 </a:solidFill>
                 <a:latin typeface="Verdana"/>
               </a:rPr>
@@ -4630,7 +4630,7 @@
             <a:r>
               <a:rPr sz="1300" b="1" i="0" spc="156">
                 <a:solidFill>
-                  <a:srgbClr val="166534"/>
+                  <a:srgbClr val="A5335F"/>
                 </a:solidFill>
                 <a:latin typeface="Verdana"/>
               </a:rPr>
@@ -4656,7 +4656,7 @@
             </a:avLst>
           </a:prstGeom>
           <a:solidFill>
-            <a:srgbClr val="E3F1E7"/>
+            <a:srgbClr val="FCE9F0"/>
           </a:solidFill>
           <a:ln w="12700">
             <a:solidFill>
@@ -5440,7 +5440,7 @@
             <a:r>
               <a:rPr sz="1300" b="1" i="0" spc="156">
                 <a:solidFill>
-                  <a:srgbClr val="166534"/>
+                  <a:srgbClr val="A5335F"/>
                 </a:solidFill>
                 <a:latin typeface="Verdana"/>
               </a:rPr>
@@ -5551,7 +5551,7 @@
             </a:avLst>
           </a:prstGeom>
           <a:solidFill>
-            <a:srgbClr val="E3F1E7"/>
+            <a:srgbClr val="FCE9F0"/>
           </a:solidFill>
           <a:ln>
             <a:noFill/>
@@ -5608,7 +5608,7 @@
             <a:r>
               <a:rPr sz="1500" b="1" i="0">
                 <a:solidFill>
-                  <a:srgbClr val="166534"/>
+                  <a:srgbClr val="A5335F"/>
                 </a:solidFill>
                 <a:latin typeface="Verdana"/>
               </a:rPr>
@@ -5719,7 +5719,7 @@
             </a:avLst>
           </a:prstGeom>
           <a:solidFill>
-            <a:srgbClr val="E3F1E7"/>
+            <a:srgbClr val="FCE9F0"/>
           </a:solidFill>
           <a:ln>
             <a:noFill/>
@@ -5776,7 +5776,7 @@
             <a:r>
               <a:rPr sz="1500" b="1" i="0">
                 <a:solidFill>
-                  <a:srgbClr val="166534"/>
+                  <a:srgbClr val="A5335F"/>
                 </a:solidFill>
                 <a:latin typeface="Verdana"/>
               </a:rPr>
@@ -5887,7 +5887,7 @@
             </a:avLst>
           </a:prstGeom>
           <a:solidFill>
-            <a:srgbClr val="E3F1E7"/>
+            <a:srgbClr val="FCE9F0"/>
           </a:solidFill>
           <a:ln>
             <a:noFill/>
@@ -5944,7 +5944,7 @@
             <a:r>
               <a:rPr sz="1500" b="1" i="0">
                 <a:solidFill>
-                  <a:srgbClr val="166534"/>
+                  <a:srgbClr val="A5335F"/>
                 </a:solidFill>
                 <a:latin typeface="Verdana"/>
               </a:rPr>
@@ -6055,7 +6055,7 @@
             </a:avLst>
           </a:prstGeom>
           <a:solidFill>
-            <a:srgbClr val="E3F1E7"/>
+            <a:srgbClr val="FCE9F0"/>
           </a:solidFill>
           <a:ln>
             <a:noFill/>
@@ -6112,7 +6112,7 @@
             <a:r>
               <a:rPr sz="1500" b="1" i="0">
                 <a:solidFill>
-                  <a:srgbClr val="166534"/>
+                  <a:srgbClr val="A5335F"/>
                 </a:solidFill>
                 <a:latin typeface="Verdana"/>
               </a:rPr>
@@ -6328,7 +6328,7 @@
             <a:r>
               <a:rPr sz="1300" b="1" i="0" spc="156">
                 <a:solidFill>
-                  <a:srgbClr val="166534"/>
+                  <a:srgbClr val="A5335F"/>
                 </a:solidFill>
                 <a:latin typeface="Verdana"/>
               </a:rPr>
@@ -7268,7 +7268,7 @@
             <a:r>
               <a:rPr sz="1300" b="1" i="0" spc="156">
                 <a:solidFill>
-                  <a:srgbClr val="166534"/>
+                  <a:srgbClr val="A5335F"/>
                 </a:solidFill>
                 <a:latin typeface="Verdana"/>
               </a:rPr>
@@ -8088,7 +8088,7 @@
             <a:r>
               <a:rPr sz="1300" b="1" i="0" spc="156">
                 <a:solidFill>
-                  <a:srgbClr val="166534"/>
+                  <a:srgbClr val="A5335F"/>
                 </a:solidFill>
                 <a:latin typeface="Verdana"/>
               </a:rPr>
@@ -8908,7 +8908,7 @@
             <a:r>
               <a:rPr sz="1300" b="1" i="0" spc="156">
                 <a:solidFill>
-                  <a:srgbClr val="166534"/>
+                  <a:srgbClr val="A5335F"/>
                 </a:solidFill>
                 <a:latin typeface="Verdana"/>
               </a:rPr>
@@ -9188,7 +9188,7 @@
             <a:r>
               <a:rPr sz="1800" b="1" i="0">
                 <a:solidFill>
-                  <a:srgbClr val="166534"/>
+                  <a:srgbClr val="A5335F"/>
                 </a:solidFill>
                 <a:latin typeface="Verdana"/>
               </a:rPr>
@@ -9347,7 +9347,7 @@
             <a:r>
               <a:rPr sz="1800" b="1" i="0">
                 <a:solidFill>
-                  <a:srgbClr val="166534"/>
+                  <a:srgbClr val="A5335F"/>
                 </a:solidFill>
                 <a:latin typeface="Verdana"/>
               </a:rPr>
@@ -9506,7 +9506,7 @@
             <a:r>
               <a:rPr sz="1800" b="1" i="0">
                 <a:solidFill>
-                  <a:srgbClr val="166534"/>
+                  <a:srgbClr val="A5335F"/>
                 </a:solidFill>
                 <a:latin typeface="Verdana"/>
               </a:rPr>
@@ -9665,7 +9665,7 @@
             <a:r>
               <a:rPr sz="1800" b="1" i="0">
                 <a:solidFill>
-                  <a:srgbClr val="166534"/>
+                  <a:srgbClr val="A5335F"/>
                 </a:solidFill>
                 <a:latin typeface="Verdana"/>
               </a:rPr>
@@ -9966,7 +9966,7 @@
             <a:r>
               <a:rPr sz="1300" b="1" i="0" spc="156">
                 <a:solidFill>
-                  <a:srgbClr val="166534"/>
+                  <a:srgbClr val="A5335F"/>
                 </a:solidFill>
                 <a:latin typeface="Verdana"/>
               </a:rPr>
@@ -10246,7 +10246,7 @@
             <a:r>
               <a:rPr sz="1700" b="1" i="0">
                 <a:solidFill>
-                  <a:srgbClr val="166534"/>
+                  <a:srgbClr val="A5335F"/>
                 </a:solidFill>
                 <a:latin typeface="Verdana"/>
               </a:rPr>
@@ -10405,7 +10405,7 @@
             <a:r>
               <a:rPr sz="1700" b="1" i="0">
                 <a:solidFill>
-                  <a:srgbClr val="166534"/>
+                  <a:srgbClr val="A5335F"/>
                 </a:solidFill>
                 <a:latin typeface="Verdana"/>
               </a:rPr>
@@ -10564,7 +10564,7 @@
             <a:r>
               <a:rPr sz="1700" b="1" i="0">
                 <a:solidFill>
-                  <a:srgbClr val="166534"/>
+                  <a:srgbClr val="A5335F"/>
                 </a:solidFill>
                 <a:latin typeface="Verdana"/>
               </a:rPr>
@@ -10723,7 +10723,7 @@
             <a:r>
               <a:rPr sz="1700" b="1" i="0">
                 <a:solidFill>
-                  <a:srgbClr val="166534"/>
+                  <a:srgbClr val="A5335F"/>
                 </a:solidFill>
                 <a:latin typeface="Verdana"/>
               </a:rPr>
@@ -10882,7 +10882,7 @@
             <a:r>
               <a:rPr sz="1700" b="1" i="0">
                 <a:solidFill>
-                  <a:srgbClr val="166534"/>
+                  <a:srgbClr val="A5335F"/>
                 </a:solidFill>
                 <a:latin typeface="Verdana"/>
               </a:rPr>
@@ -11183,7 +11183,7 @@
             <a:r>
               <a:rPr sz="1300" b="1" i="0" spc="156">
                 <a:solidFill>
-                  <a:srgbClr val="166534"/>
+                  <a:srgbClr val="A5335F"/>
                 </a:solidFill>
                 <a:latin typeface="Verdana"/>
               </a:rPr>
@@ -11307,7 +11307,7 @@
             <a:r>
               <a:rPr sz="2100" b="1" i="0">
                 <a:solidFill>
-                  <a:srgbClr val="166534"/>
+                  <a:srgbClr val="A5335F"/>
                 </a:solidFill>
                 <a:latin typeface="Verdana"/>
               </a:rPr>
@@ -11431,7 +11431,7 @@
             <a:r>
               <a:rPr sz="2100" b="1" i="0">
                 <a:solidFill>
-                  <a:srgbClr val="166534"/>
+                  <a:srgbClr val="A5335F"/>
                 </a:solidFill>
                 <a:latin typeface="Verdana"/>
               </a:rPr>
@@ -11555,7 +11555,7 @@
             <a:r>
               <a:rPr sz="2100" b="1" i="0">
                 <a:solidFill>
-                  <a:srgbClr val="166534"/>
+                  <a:srgbClr val="A5335F"/>
                 </a:solidFill>
                 <a:latin typeface="Verdana"/>
               </a:rPr>
@@ -11679,7 +11679,7 @@
             <a:r>
               <a:rPr sz="2100" b="1" i="0">
                 <a:solidFill>
-                  <a:srgbClr val="166534"/>
+                  <a:srgbClr val="A5335F"/>
                 </a:solidFill>
                 <a:latin typeface="Verdana"/>
               </a:rPr>
@@ -11895,7 +11895,7 @@
             <a:r>
               <a:rPr sz="1300" b="1" i="0" spc="156">
                 <a:solidFill>
-                  <a:srgbClr val="166534"/>
+                  <a:srgbClr val="A5335F"/>
                 </a:solidFill>
                 <a:latin typeface="Verdana"/>
               </a:rPr>
@@ -12019,7 +12019,7 @@
             <a:r>
               <a:rPr sz="2100" b="1" i="0">
                 <a:solidFill>
-                  <a:srgbClr val="166534"/>
+                  <a:srgbClr val="A5335F"/>
                 </a:solidFill>
                 <a:latin typeface="Verdana"/>
               </a:rPr>
@@ -12143,7 +12143,7 @@
             <a:r>
               <a:rPr sz="2100" b="1" i="0">
                 <a:solidFill>
-                  <a:srgbClr val="166534"/>
+                  <a:srgbClr val="A5335F"/>
                 </a:solidFill>
                 <a:latin typeface="Verdana"/>
               </a:rPr>
@@ -12267,7 +12267,7 @@
             <a:r>
               <a:rPr sz="2100" b="1" i="0">
                 <a:solidFill>
-                  <a:srgbClr val="166534"/>
+                  <a:srgbClr val="A5335F"/>
                 </a:solidFill>
                 <a:latin typeface="Verdana"/>
               </a:rPr>
@@ -12391,7 +12391,7 @@
             <a:r>
               <a:rPr sz="2100" b="1" i="0">
                 <a:solidFill>
-                  <a:srgbClr val="166534"/>
+                  <a:srgbClr val="A5335F"/>
                 </a:solidFill>
                 <a:latin typeface="Verdana"/>
               </a:rPr>
